--- a/MDL_运维管理系统_领导汇报_优化版.pptx
+++ b/MDL_运维管理系统_领导汇报_优化版.pptx
@@ -29,6 +29,7 @@
     <p:sldId id="277" r:id="rId28"/>
     <p:sldId id="278" r:id="rId29"/>
     <p:sldId id="279" r:id="rId30"/>
+    <p:sldId id="280" r:id="rId31"/>
   </p:sldIdLst>
   <p:sldSz cx="12188952" cy="6858000" type="screen4x3"/>
   <p:notesSz cx="6858000" cy="9144000"/>
@@ -3901,7 +3902,7 @@
                   <a:srgbClr val="00B0F0"/>
                 </a:solidFill>
               </a:rPr>
-              <a:t>扩容不再是瓶颈 — 10 台机器 10 分钟全部就绪</a:t>
+              <a:t>扩容不再是瓶颈 — 10 台机器约 20 分钟全部就绪，节省原有 6+ 小时人工操作</a:t>
             </a:r>
           </a:p>
         </p:txBody>
@@ -4934,7 +4935,7 @@
                   <a:srgbClr val="2C3E50"/>
                 </a:solidFill>
               </a:rPr>
-              <a:t>40 分钟</a:t>
+              <a:t>约 40 分钟</a:t>
             </a:r>
           </a:p>
         </p:txBody>
@@ -4968,7 +4969,7 @@
                   <a:srgbClr val="2C3E50"/>
                 </a:solidFill>
               </a:rPr>
-              <a:t>2 分钟</a:t>
+              <a:t>约 2 分钟</a:t>
             </a:r>
           </a:p>
         </p:txBody>
@@ -5113,7 +5114,7 @@
                   <a:srgbClr val="2C3E50"/>
                 </a:solidFill>
               </a:rPr>
-              <a:t>半天以上</a:t>
+              <a:t>约 400 分钟（逐台手工）</a:t>
             </a:r>
           </a:p>
         </p:txBody>
@@ -5147,7 +5148,7 @@
                   <a:srgbClr val="2C3E50"/>
                 </a:solidFill>
               </a:rPr>
-              <a:t>10 分钟</a:t>
+              <a:t>约 20 分钟（批量自动）</a:t>
             </a:r>
           </a:p>
         </p:txBody>
@@ -5181,7 +5182,7 @@
                   <a:srgbClr val="27AE60"/>
                 </a:solidFill>
               </a:rPr>
-              <a:t>97%</a:t>
+              <a:t>95%</a:t>
             </a:r>
           </a:p>
         </p:txBody>
@@ -15593,7 +15594,7 @@
                   <a:srgbClr val="2C3E50"/>
                 </a:solidFill>
               </a:rPr>
-              <a:t>半天以上</a:t>
+              <a:t>约 400 分钟（逐台手工）</a:t>
             </a:r>
           </a:p>
         </p:txBody>
@@ -15627,7 +15628,7 @@
                   <a:srgbClr val="2C3E50"/>
                 </a:solidFill>
               </a:rPr>
-              <a:t>10 分钟</a:t>
+              <a:t>约 20 分钟</a:t>
             </a:r>
           </a:p>
         </p:txBody>
@@ -15661,7 +15662,7 @@
                   <a:srgbClr val="27AE60"/>
                 </a:solidFill>
               </a:rPr>
-              <a:t>97%</a:t>
+              <a:t>95%</a:t>
             </a:r>
           </a:p>
         </p:txBody>
@@ -15695,7 +15696,7 @@
                   <a:srgbClr val="2C3E50"/>
                 </a:solidFill>
               </a:rPr>
-              <a:t>批量初始化，串行执行，自动记录状态</a:t>
+              <a:t>批量初始化，每台约 2 分钟，节省与单台一致</a:t>
             </a:r>
           </a:p>
         </p:txBody>
@@ -20904,7 +20905,7 @@
                   <a:srgbClr val="00B0F0"/>
                 </a:solidFill>
               </a:rPr>
-              <a:t>持续演进，构建更完整的智能运维体系</a:t>
+              <a:t>根据实际使用反馈持续迭代完善</a:t>
             </a:r>
           </a:p>
         </p:txBody>
@@ -21137,7 +21138,7 @@
                   <a:srgbClr val="FFFFFF"/>
                 </a:solidFill>
               </a:rPr>
-              <a:t>近期（Q2 2026）</a:t>
+              <a:t>已确定方向</a:t>
             </a:r>
           </a:p>
         </p:txBody>
@@ -21171,7 +21172,7 @@
                   <a:srgbClr val="2C3E50"/>
                 </a:solidFill>
               </a:rPr>
-              <a:t>▶ 支持更多服务类型的初始化（转发机/出口机/数据机）</a:t>
+              <a:t>▶ 支持更多服务类型的初始化</a:t>
             </a:r>
           </a:p>
         </p:txBody>
@@ -21205,7 +21206,7 @@
                   <a:srgbClr val="2C3E50"/>
                 </a:solidFill>
               </a:rPr>
-              <a:t>▶ 配置差异自动修复（一键将异常机器同步到目标版本）</a:t>
+              <a:t>   （当前仅支持转发机，后续按需扩展）</a:t>
             </a:r>
           </a:p>
         </p:txBody>
@@ -21239,7 +21240,7 @@
                   <a:srgbClr val="2C3E50"/>
                 </a:solidFill>
               </a:rPr>
-              <a:t>▶ 批量操作支持暂停 / 继续</a:t>
+              <a:t/>
             </a:r>
           </a:p>
         </p:txBody>
@@ -21273,7 +21274,7 @@
                   <a:srgbClr val="2C3E50"/>
                 </a:solidFill>
               </a:rPr>
-              <a:t>▶ 导出失败机器列表，方便后续单独处理</a:t>
+              <a:t/>
             </a:r>
           </a:p>
         </p:txBody>
@@ -21307,7 +21308,7 @@
                   <a:srgbClr val="2C3E50"/>
                 </a:solidFill>
               </a:rPr>
-              <a:t>▶ 初始化完成自动触发配置同步</a:t>
+              <a:t/>
             </a:r>
           </a:p>
         </p:txBody>
@@ -21429,7 +21430,7 @@
                   <a:srgbClr val="FFFFFF"/>
                 </a:solidFill>
               </a:rPr>
-              <a:t>中期（Q3 2026）</a:t>
+              <a:t>待评估规划</a:t>
             </a:r>
           </a:p>
         </p:txBody>
@@ -21463,7 +21464,7 @@
                   <a:srgbClr val="2C3E50"/>
                 </a:solidFill>
               </a:rPr>
-              <a:t>▶ 自动巡检报警（定时检测，异常推送企业微信）</a:t>
+              <a:t>▶ 根据使用反馈确定优先级</a:t>
             </a:r>
           </a:p>
         </p:txBody>
@@ -21497,7 +21498,7 @@
                   <a:srgbClr val="2C3E50"/>
                 </a:solidFill>
               </a:rPr>
-              <a:t>▶ 接入 CMDB 自动同步服务器信息</a:t>
+              <a:t>▶ 具体需求与排期持续收集中</a:t>
             </a:r>
           </a:p>
         </p:txBody>
@@ -21531,7 +21532,7 @@
                   <a:srgbClr val="2C3E50"/>
                 </a:solidFill>
               </a:rPr>
-              <a:t>▶ 配置模板管理（保存常用初始化配置为模板）</a:t>
+              <a:t/>
             </a:r>
           </a:p>
         </p:txBody>
@@ -21565,7 +21566,7 @@
                   <a:srgbClr val="2C3E50"/>
                 </a:solidFill>
               </a:rPr>
-              <a:t>▶ 操作回放功能（完整操作时序可视化）</a:t>
+              <a:t/>
             </a:r>
           </a:p>
         </p:txBody>
@@ -21599,7 +21600,7 @@
                   <a:srgbClr val="2C3E50"/>
                 </a:solidFill>
               </a:rPr>
-              <a:t>▶ 服务器健康度看板</a:t>
+              <a:t/>
             </a:r>
           </a:p>
         </p:txBody>
@@ -21721,7 +21722,7 @@
                   <a:srgbClr val="FFFFFF"/>
                 </a:solidFill>
               </a:rPr>
-              <a:t>远期（2027+）</a:t>
+              <a:t>持续优化</a:t>
             </a:r>
           </a:p>
         </p:txBody>
@@ -21755,7 +21756,7 @@
                   <a:srgbClr val="2C3E50"/>
                 </a:solidFill>
               </a:rPr>
-              <a:t>▶ AI 辅助配置分析（异常配置智能识别）</a:t>
+              <a:t>▶ 已有功能的体验优化</a:t>
             </a:r>
           </a:p>
         </p:txBody>
@@ -21789,7 +21790,7 @@
                   <a:srgbClr val="2C3E50"/>
                 </a:solidFill>
               </a:rPr>
-              <a:t>▶ 容器化部署支持（Kubernetes 集成）</a:t>
+              <a:t>▶ 性能与稳定性提升</a:t>
             </a:r>
           </a:p>
         </p:txBody>
@@ -21823,7 +21824,7 @@
                   <a:srgbClr val="2C3E50"/>
                 </a:solidFill>
               </a:rPr>
-              <a:t>▶ 多集群统一管理</a:t>
+              <a:t>▶ 文档与操作规范完善</a:t>
             </a:r>
           </a:p>
         </p:txBody>
@@ -21857,7 +21858,7 @@
                   <a:srgbClr val="2C3E50"/>
                 </a:solidFill>
               </a:rPr>
-              <a:t>▶ 自愈能力（故障自动触发回滚）</a:t>
+              <a:t/>
             </a:r>
           </a:p>
         </p:txBody>
@@ -21891,7 +21892,7 @@
                   <a:srgbClr val="2C3E50"/>
                 </a:solidFill>
               </a:rPr>
-              <a:t>▶ SLA 可视化报告</a:t>
+              <a:t/>
             </a:r>
           </a:p>
         </p:txBody>
@@ -21923,7 +21924,7 @@
         <p:spPr>
           <a:xfrm>
             <a:off x="0" y="0"/>
-            <a:ext cx="12188952" cy="6858000"/>
+            <a:ext cx="12188952" cy="1051560"/>
           </a:xfrm>
           <a:prstGeom prst="rect">
             <a:avLst/>
@@ -21959,6 +21960,1085 @@
       </p:sp>
       <p:sp>
         <p:nvSpPr>
+          <p:cNvPr id="3" name="TextBox 2"/>
+          <p:cNvSpPr txBox="1"/>
+          <p:nvPr/>
+        </p:nvSpPr>
+        <p:spPr>
+          <a:xfrm>
+            <a:off x="320040" y="91440"/>
+            <a:ext cx="9144000" cy="548640"/>
+          </a:xfrm>
+          <a:prstGeom prst="rect">
+            <a:avLst/>
+          </a:prstGeom>
+          <a:noFill/>
+        </p:spPr>
+        <p:txBody>
+          <a:bodyPr wrap="square">
+            <a:spAutoFit/>
+          </a:bodyPr>
+          <a:lstStyle/>
+          <a:p>
+            <a:pPr algn="l"/>
+            <a:r>
+              <a:rPr sz="2800" b="1" i="0">
+                <a:solidFill>
+                  <a:srgbClr val="FFFFFF"/>
+                </a:solidFill>
+              </a:rPr>
+              <a:t>二十三、系统界面预览</a:t>
+            </a:r>
+          </a:p>
+        </p:txBody>
+      </p:sp>
+      <p:sp>
+        <p:nvSpPr>
+          <p:cNvPr id="4" name="TextBox 3"/>
+          <p:cNvSpPr txBox="1"/>
+          <p:nvPr/>
+        </p:nvSpPr>
+        <p:spPr>
+          <a:xfrm>
+            <a:off x="320040" y="621792"/>
+            <a:ext cx="9144000" cy="347472"/>
+          </a:xfrm>
+          <a:prstGeom prst="rect">
+            <a:avLst/>
+          </a:prstGeom>
+          <a:noFill/>
+        </p:spPr>
+        <p:txBody>
+          <a:bodyPr wrap="square">
+            <a:spAutoFit/>
+          </a:bodyPr>
+          <a:lstStyle/>
+          <a:p>
+            <a:pPr algn="l"/>
+            <a:r>
+              <a:rPr sz="1300" b="0" i="0">
+                <a:solidFill>
+                  <a:srgbClr val="00B0F0"/>
+                </a:solidFill>
+              </a:rPr>
+              <a:t>真实系统截图 — 所见即所得的运维体验</a:t>
+            </a:r>
+          </a:p>
+        </p:txBody>
+      </p:sp>
+      <p:sp>
+        <p:nvSpPr>
+          <p:cNvPr id="5" name="Rectangle 4"/>
+          <p:cNvSpPr/>
+          <p:nvPr/>
+        </p:nvSpPr>
+        <p:spPr>
+          <a:xfrm>
+            <a:off x="0" y="6510528"/>
+            <a:ext cx="12188952" cy="347472"/>
+          </a:xfrm>
+          <a:prstGeom prst="rect">
+            <a:avLst/>
+          </a:prstGeom>
+          <a:solidFill>
+            <a:srgbClr val="0D2B55"/>
+          </a:solidFill>
+          <a:ln>
+            <a:noFill/>
+          </a:ln>
+        </p:spPr>
+        <p:style>
+          <a:lnRef idx="1">
+            <a:schemeClr val="accent1"/>
+          </a:lnRef>
+          <a:fillRef idx="3">
+            <a:schemeClr val="accent1"/>
+          </a:fillRef>
+          <a:effectRef idx="2">
+            <a:schemeClr val="accent1"/>
+          </a:effectRef>
+          <a:fontRef idx="minor">
+            <a:schemeClr val="lt1"/>
+          </a:fontRef>
+        </p:style>
+        <p:txBody>
+          <a:bodyPr rtlCol="0" anchor="ctr"/>
+          <a:lstStyle/>
+          <a:p>
+            <a:pPr algn="ctr"/>
+          </a:p>
+        </p:txBody>
+      </p:sp>
+      <p:sp>
+        <p:nvSpPr>
+          <p:cNvPr id="6" name="TextBox 5"/>
+          <p:cNvSpPr txBox="1"/>
+          <p:nvPr/>
+        </p:nvSpPr>
+        <p:spPr>
+          <a:xfrm>
+            <a:off x="274320" y="6528816"/>
+            <a:ext cx="8229600" cy="310896"/>
+          </a:xfrm>
+          <a:prstGeom prst="rect">
+            <a:avLst/>
+          </a:prstGeom>
+          <a:noFill/>
+        </p:spPr>
+        <p:txBody>
+          <a:bodyPr wrap="square">
+            <a:spAutoFit/>
+          </a:bodyPr>
+          <a:lstStyle/>
+          <a:p>
+            <a:pPr algn="l"/>
+            <a:r>
+              <a:rPr sz="900" b="0" i="0">
+                <a:solidFill>
+                  <a:srgbClr val="ECF0F1"/>
+                </a:solidFill>
+              </a:rPr>
+              <a:t>MDL 服务器运维管理系统  |  运维研发团队  |  2026</a:t>
+            </a:r>
+          </a:p>
+        </p:txBody>
+      </p:sp>
+      <p:sp>
+        <p:nvSpPr>
+          <p:cNvPr id="7" name="TextBox 6"/>
+          <p:cNvSpPr txBox="1"/>
+          <p:nvPr/>
+        </p:nvSpPr>
+        <p:spPr>
+          <a:xfrm>
+            <a:off x="11091672" y="6528816"/>
+            <a:ext cx="914400" cy="310896"/>
+          </a:xfrm>
+          <a:prstGeom prst="rect">
+            <a:avLst/>
+          </a:prstGeom>
+          <a:noFill/>
+        </p:spPr>
+        <p:txBody>
+          <a:bodyPr wrap="square">
+            <a:spAutoFit/>
+          </a:bodyPr>
+          <a:lstStyle/>
+          <a:p>
+            <a:pPr algn="r"/>
+            <a:r>
+              <a:rPr sz="900" b="0" i="0">
+                <a:solidFill>
+                  <a:srgbClr val="ECF0F1"/>
+                </a:solidFill>
+              </a:rPr>
+              <a:t>24 / 25</a:t>
+            </a:r>
+          </a:p>
+        </p:txBody>
+      </p:sp>
+      <p:sp>
+        <p:nvSpPr>
+          <p:cNvPr id="8" name="Rectangle 7"/>
+          <p:cNvSpPr/>
+          <p:nvPr/>
+        </p:nvSpPr>
+        <p:spPr>
+          <a:xfrm>
+            <a:off x="274320" y="1188720"/>
+            <a:ext cx="5760720" cy="2514600"/>
+          </a:xfrm>
+          <a:prstGeom prst="rect">
+            <a:avLst/>
+          </a:prstGeom>
+          <a:solidFill>
+            <a:srgbClr val="ECF0F1"/>
+          </a:solidFill>
+          <a:ln w="25400">
+            <a:solidFill>
+              <a:srgbClr val="0070C0"/>
+            </a:solidFill>
+          </a:ln>
+        </p:spPr>
+        <p:style>
+          <a:lnRef idx="1">
+            <a:schemeClr val="accent1"/>
+          </a:lnRef>
+          <a:fillRef idx="3">
+            <a:schemeClr val="accent1"/>
+          </a:fillRef>
+          <a:effectRef idx="2">
+            <a:schemeClr val="accent1"/>
+          </a:effectRef>
+          <a:fontRef idx="minor">
+            <a:schemeClr val="lt1"/>
+          </a:fontRef>
+        </p:style>
+        <p:txBody>
+          <a:bodyPr rtlCol="0" anchor="ctr"/>
+          <a:lstStyle/>
+          <a:p>
+            <a:pPr algn="ctr"/>
+          </a:p>
+        </p:txBody>
+      </p:sp>
+      <p:sp>
+        <p:nvSpPr>
+          <p:cNvPr id="9" name="Rectangle 8"/>
+          <p:cNvSpPr/>
+          <p:nvPr/>
+        </p:nvSpPr>
+        <p:spPr>
+          <a:xfrm>
+            <a:off x="274320" y="1188720"/>
+            <a:ext cx="5760720" cy="347472"/>
+          </a:xfrm>
+          <a:prstGeom prst="rect">
+            <a:avLst/>
+          </a:prstGeom>
+          <a:solidFill>
+            <a:srgbClr val="0070C0"/>
+          </a:solidFill>
+          <a:ln>
+            <a:noFill/>
+          </a:ln>
+        </p:spPr>
+        <p:style>
+          <a:lnRef idx="1">
+            <a:schemeClr val="accent1"/>
+          </a:lnRef>
+          <a:fillRef idx="3">
+            <a:schemeClr val="accent1"/>
+          </a:fillRef>
+          <a:effectRef idx="2">
+            <a:schemeClr val="accent1"/>
+          </a:effectRef>
+          <a:fontRef idx="minor">
+            <a:schemeClr val="lt1"/>
+          </a:fontRef>
+        </p:style>
+        <p:txBody>
+          <a:bodyPr rtlCol="0" anchor="ctr"/>
+          <a:lstStyle/>
+          <a:p>
+            <a:pPr algn="ctr"/>
+          </a:p>
+        </p:txBody>
+      </p:sp>
+      <p:sp>
+        <p:nvSpPr>
+          <p:cNvPr id="10" name="TextBox 9"/>
+          <p:cNvSpPr txBox="1"/>
+          <p:nvPr/>
+        </p:nvSpPr>
+        <p:spPr>
+          <a:xfrm>
+            <a:off x="384048" y="1225296"/>
+            <a:ext cx="5577840" cy="274320"/>
+          </a:xfrm>
+          <a:prstGeom prst="rect">
+            <a:avLst/>
+          </a:prstGeom>
+          <a:noFill/>
+        </p:spPr>
+        <p:txBody>
+          <a:bodyPr wrap="square">
+            <a:spAutoFit/>
+          </a:bodyPr>
+          <a:lstStyle/>
+          <a:p>
+            <a:pPr algn="l"/>
+            <a:r>
+              <a:rPr sz="1200" b="1" i="0">
+                <a:solidFill>
+                  <a:srgbClr val="FFFFFF"/>
+                </a:solidFill>
+              </a:rPr>
+              <a:t>服务器管理列表</a:t>
+            </a:r>
+          </a:p>
+        </p:txBody>
+      </p:sp>
+      <p:sp>
+        <p:nvSpPr>
+          <p:cNvPr id="11" name="TextBox 10"/>
+          <p:cNvSpPr txBox="1"/>
+          <p:nvPr/>
+        </p:nvSpPr>
+        <p:spPr>
+          <a:xfrm>
+            <a:off x="274320" y="2011680"/>
+            <a:ext cx="5760720" cy="457200"/>
+          </a:xfrm>
+          <a:prstGeom prst="rect">
+            <a:avLst/>
+          </a:prstGeom>
+          <a:noFill/>
+        </p:spPr>
+        <p:txBody>
+          <a:bodyPr wrap="square">
+            <a:spAutoFit/>
+          </a:bodyPr>
+          <a:lstStyle/>
+          <a:p>
+            <a:pPr algn="ctr"/>
+            <a:r>
+              <a:rPr sz="1800" b="0" i="1">
+                <a:solidFill>
+                  <a:srgbClr val="95A5A6"/>
+                </a:solidFill>
+              </a:rPr>
+              <a:t>[ 截图占位 ]</a:t>
+            </a:r>
+          </a:p>
+        </p:txBody>
+      </p:sp>
+      <p:sp>
+        <p:nvSpPr>
+          <p:cNvPr id="12" name="TextBox 11"/>
+          <p:cNvSpPr txBox="1"/>
+          <p:nvPr/>
+        </p:nvSpPr>
+        <p:spPr>
+          <a:xfrm>
+            <a:off x="411480" y="2606040"/>
+            <a:ext cx="5532120" cy="548640"/>
+          </a:xfrm>
+          <a:prstGeom prst="rect">
+            <a:avLst/>
+          </a:prstGeom>
+          <a:noFill/>
+        </p:spPr>
+        <p:txBody>
+          <a:bodyPr wrap="square">
+            <a:spAutoFit/>
+          </a:bodyPr>
+          <a:lstStyle/>
+          <a:p>
+            <a:pPr algn="ctr"/>
+            <a:r>
+              <a:rPr sz="1050" b="0" i="0">
+                <a:solidFill>
+                  <a:srgbClr val="2C3E50"/>
+                </a:solidFill>
+              </a:rPr>
+              <a:t>状态一览 · 生命周期状态机 · 操作按钮</a:t>
+            </a:r>
+          </a:p>
+        </p:txBody>
+      </p:sp>
+      <p:sp>
+        <p:nvSpPr>
+          <p:cNvPr id="13" name="Rectangle 12"/>
+          <p:cNvSpPr/>
+          <p:nvPr/>
+        </p:nvSpPr>
+        <p:spPr>
+          <a:xfrm>
+            <a:off x="6263640" y="1188720"/>
+            <a:ext cx="5760720" cy="2514600"/>
+          </a:xfrm>
+          <a:prstGeom prst="rect">
+            <a:avLst/>
+          </a:prstGeom>
+          <a:solidFill>
+            <a:srgbClr val="ECF0F1"/>
+          </a:solidFill>
+          <a:ln w="25400">
+            <a:solidFill>
+              <a:srgbClr val="27AE60"/>
+            </a:solidFill>
+          </a:ln>
+        </p:spPr>
+        <p:style>
+          <a:lnRef idx="1">
+            <a:schemeClr val="accent1"/>
+          </a:lnRef>
+          <a:fillRef idx="3">
+            <a:schemeClr val="accent1"/>
+          </a:fillRef>
+          <a:effectRef idx="2">
+            <a:schemeClr val="accent1"/>
+          </a:effectRef>
+          <a:fontRef idx="minor">
+            <a:schemeClr val="lt1"/>
+          </a:fontRef>
+        </p:style>
+        <p:txBody>
+          <a:bodyPr rtlCol="0" anchor="ctr"/>
+          <a:lstStyle/>
+          <a:p>
+            <a:pPr algn="ctr"/>
+          </a:p>
+        </p:txBody>
+      </p:sp>
+      <p:sp>
+        <p:nvSpPr>
+          <p:cNvPr id="14" name="Rectangle 13"/>
+          <p:cNvSpPr/>
+          <p:nvPr/>
+        </p:nvSpPr>
+        <p:spPr>
+          <a:xfrm>
+            <a:off x="6263640" y="1188720"/>
+            <a:ext cx="5760720" cy="347472"/>
+          </a:xfrm>
+          <a:prstGeom prst="rect">
+            <a:avLst/>
+          </a:prstGeom>
+          <a:solidFill>
+            <a:srgbClr val="27AE60"/>
+          </a:solidFill>
+          <a:ln>
+            <a:noFill/>
+          </a:ln>
+        </p:spPr>
+        <p:style>
+          <a:lnRef idx="1">
+            <a:schemeClr val="accent1"/>
+          </a:lnRef>
+          <a:fillRef idx="3">
+            <a:schemeClr val="accent1"/>
+          </a:fillRef>
+          <a:effectRef idx="2">
+            <a:schemeClr val="accent1"/>
+          </a:effectRef>
+          <a:fontRef idx="minor">
+            <a:schemeClr val="lt1"/>
+          </a:fontRef>
+        </p:style>
+        <p:txBody>
+          <a:bodyPr rtlCol="0" anchor="ctr"/>
+          <a:lstStyle/>
+          <a:p>
+            <a:pPr algn="ctr"/>
+          </a:p>
+        </p:txBody>
+      </p:sp>
+      <p:sp>
+        <p:nvSpPr>
+          <p:cNvPr id="15" name="TextBox 14"/>
+          <p:cNvSpPr txBox="1"/>
+          <p:nvPr/>
+        </p:nvSpPr>
+        <p:spPr>
+          <a:xfrm>
+            <a:off x="6373368" y="1225296"/>
+            <a:ext cx="5577840" cy="274320"/>
+          </a:xfrm>
+          <a:prstGeom prst="rect">
+            <a:avLst/>
+          </a:prstGeom>
+          <a:noFill/>
+        </p:spPr>
+        <p:txBody>
+          <a:bodyPr wrap="square">
+            <a:spAutoFit/>
+          </a:bodyPr>
+          <a:lstStyle/>
+          <a:p>
+            <a:pPr algn="l"/>
+            <a:r>
+              <a:rPr sz="1200" b="1" i="0">
+                <a:solidFill>
+                  <a:srgbClr val="FFFFFF"/>
+                </a:solidFill>
+              </a:rPr>
+              <a:t>批量初始化执行中</a:t>
+            </a:r>
+          </a:p>
+        </p:txBody>
+      </p:sp>
+      <p:sp>
+        <p:nvSpPr>
+          <p:cNvPr id="16" name="TextBox 15"/>
+          <p:cNvSpPr txBox="1"/>
+          <p:nvPr/>
+        </p:nvSpPr>
+        <p:spPr>
+          <a:xfrm>
+            <a:off x="6263640" y="2011680"/>
+            <a:ext cx="5760720" cy="457200"/>
+          </a:xfrm>
+          <a:prstGeom prst="rect">
+            <a:avLst/>
+          </a:prstGeom>
+          <a:noFill/>
+        </p:spPr>
+        <p:txBody>
+          <a:bodyPr wrap="square">
+            <a:spAutoFit/>
+          </a:bodyPr>
+          <a:lstStyle/>
+          <a:p>
+            <a:pPr algn="ctr"/>
+            <a:r>
+              <a:rPr sz="1800" b="0" i="1">
+                <a:solidFill>
+                  <a:srgbClr val="95A5A6"/>
+                </a:solidFill>
+              </a:rPr>
+              <a:t>[ 截图占位 ]</a:t>
+            </a:r>
+          </a:p>
+        </p:txBody>
+      </p:sp>
+      <p:sp>
+        <p:nvSpPr>
+          <p:cNvPr id="17" name="TextBox 16"/>
+          <p:cNvSpPr txBox="1"/>
+          <p:nvPr/>
+        </p:nvSpPr>
+        <p:spPr>
+          <a:xfrm>
+            <a:off x="6400800" y="2606040"/>
+            <a:ext cx="5532120" cy="548640"/>
+          </a:xfrm>
+          <a:prstGeom prst="rect">
+            <a:avLst/>
+          </a:prstGeom>
+          <a:noFill/>
+        </p:spPr>
+        <p:txBody>
+          <a:bodyPr wrap="square">
+            <a:spAutoFit/>
+          </a:bodyPr>
+          <a:lstStyle/>
+          <a:p>
+            <a:pPr algn="ctr"/>
+            <a:r>
+              <a:rPr sz="1050" b="0" i="0">
+                <a:solidFill>
+                  <a:srgbClr val="2C3E50"/>
+                </a:solidFill>
+              </a:rPr>
+              <a:t>实时日志输出 · 进度可视 · 多台并列状态</a:t>
+            </a:r>
+          </a:p>
+        </p:txBody>
+      </p:sp>
+      <p:sp>
+        <p:nvSpPr>
+          <p:cNvPr id="18" name="Rectangle 17"/>
+          <p:cNvSpPr/>
+          <p:nvPr/>
+        </p:nvSpPr>
+        <p:spPr>
+          <a:xfrm>
+            <a:off x="274320" y="3886200"/>
+            <a:ext cx="5760720" cy="2514600"/>
+          </a:xfrm>
+          <a:prstGeom prst="rect">
+            <a:avLst/>
+          </a:prstGeom>
+          <a:solidFill>
+            <a:srgbClr val="ECF0F1"/>
+          </a:solidFill>
+          <a:ln w="25400">
+            <a:solidFill>
+              <a:srgbClr val="E67E22"/>
+            </a:solidFill>
+          </a:ln>
+        </p:spPr>
+        <p:style>
+          <a:lnRef idx="1">
+            <a:schemeClr val="accent1"/>
+          </a:lnRef>
+          <a:fillRef idx="3">
+            <a:schemeClr val="accent1"/>
+          </a:fillRef>
+          <a:effectRef idx="2">
+            <a:schemeClr val="accent1"/>
+          </a:effectRef>
+          <a:fontRef idx="minor">
+            <a:schemeClr val="lt1"/>
+          </a:fontRef>
+        </p:style>
+        <p:txBody>
+          <a:bodyPr rtlCol="0" anchor="ctr"/>
+          <a:lstStyle/>
+          <a:p>
+            <a:pPr algn="ctr"/>
+          </a:p>
+        </p:txBody>
+      </p:sp>
+      <p:sp>
+        <p:nvSpPr>
+          <p:cNvPr id="19" name="Rectangle 18"/>
+          <p:cNvSpPr/>
+          <p:nvPr/>
+        </p:nvSpPr>
+        <p:spPr>
+          <a:xfrm>
+            <a:off x="274320" y="3886200"/>
+            <a:ext cx="5760720" cy="347472"/>
+          </a:xfrm>
+          <a:prstGeom prst="rect">
+            <a:avLst/>
+          </a:prstGeom>
+          <a:solidFill>
+            <a:srgbClr val="E67E22"/>
+          </a:solidFill>
+          <a:ln>
+            <a:noFill/>
+          </a:ln>
+        </p:spPr>
+        <p:style>
+          <a:lnRef idx="1">
+            <a:schemeClr val="accent1"/>
+          </a:lnRef>
+          <a:fillRef idx="3">
+            <a:schemeClr val="accent1"/>
+          </a:fillRef>
+          <a:effectRef idx="2">
+            <a:schemeClr val="accent1"/>
+          </a:effectRef>
+          <a:fontRef idx="minor">
+            <a:schemeClr val="lt1"/>
+          </a:fontRef>
+        </p:style>
+        <p:txBody>
+          <a:bodyPr rtlCol="0" anchor="ctr"/>
+          <a:lstStyle/>
+          <a:p>
+            <a:pPr algn="ctr"/>
+          </a:p>
+        </p:txBody>
+      </p:sp>
+      <p:sp>
+        <p:nvSpPr>
+          <p:cNvPr id="20" name="TextBox 19"/>
+          <p:cNvSpPr txBox="1"/>
+          <p:nvPr/>
+        </p:nvSpPr>
+        <p:spPr>
+          <a:xfrm>
+            <a:off x="384048" y="3922776"/>
+            <a:ext cx="5577840" cy="274320"/>
+          </a:xfrm>
+          <a:prstGeom prst="rect">
+            <a:avLst/>
+          </a:prstGeom>
+          <a:noFill/>
+        </p:spPr>
+        <p:txBody>
+          <a:bodyPr wrap="square">
+            <a:spAutoFit/>
+          </a:bodyPr>
+          <a:lstStyle/>
+          <a:p>
+            <a:pPr algn="l"/>
+            <a:r>
+              <a:rPr sz="1200" b="1" i="0">
+                <a:solidFill>
+                  <a:srgbClr val="FFFFFF"/>
+                </a:solidFill>
+              </a:rPr>
+              <a:t>配置管理编辑器</a:t>
+            </a:r>
+          </a:p>
+        </p:txBody>
+      </p:sp>
+      <p:sp>
+        <p:nvSpPr>
+          <p:cNvPr id="21" name="TextBox 20"/>
+          <p:cNvSpPr txBox="1"/>
+          <p:nvPr/>
+        </p:nvSpPr>
+        <p:spPr>
+          <a:xfrm>
+            <a:off x="274320" y="4709160"/>
+            <a:ext cx="5760720" cy="457200"/>
+          </a:xfrm>
+          <a:prstGeom prst="rect">
+            <a:avLst/>
+          </a:prstGeom>
+          <a:noFill/>
+        </p:spPr>
+        <p:txBody>
+          <a:bodyPr wrap="square">
+            <a:spAutoFit/>
+          </a:bodyPr>
+          <a:lstStyle/>
+          <a:p>
+            <a:pPr algn="ctr"/>
+            <a:r>
+              <a:rPr sz="1800" b="0" i="1">
+                <a:solidFill>
+                  <a:srgbClr val="95A5A6"/>
+                </a:solidFill>
+              </a:rPr>
+              <a:t>[ 截图占位 ]</a:t>
+            </a:r>
+          </a:p>
+        </p:txBody>
+      </p:sp>
+      <p:sp>
+        <p:nvSpPr>
+          <p:cNvPr id="22" name="TextBox 21"/>
+          <p:cNvSpPr txBox="1"/>
+          <p:nvPr/>
+        </p:nvSpPr>
+        <p:spPr>
+          <a:xfrm>
+            <a:off x="411480" y="5303520"/>
+            <a:ext cx="5532120" cy="548640"/>
+          </a:xfrm>
+          <a:prstGeom prst="rect">
+            <a:avLst/>
+          </a:prstGeom>
+          <a:noFill/>
+        </p:spPr>
+        <p:txBody>
+          <a:bodyPr wrap="square">
+            <a:spAutoFit/>
+          </a:bodyPr>
+          <a:lstStyle/>
+          <a:p>
+            <a:pPr algn="ctr"/>
+            <a:r>
+              <a:rPr sz="1050" b="0" i="0">
+                <a:solidFill>
+                  <a:srgbClr val="2C3E50"/>
+                </a:solidFill>
+              </a:rPr>
+              <a:t>Monaco JSON 编辑 · 实例树 · 历史快照</a:t>
+            </a:r>
+          </a:p>
+        </p:txBody>
+      </p:sp>
+      <p:sp>
+        <p:nvSpPr>
+          <p:cNvPr id="23" name="Rectangle 22"/>
+          <p:cNvSpPr/>
+          <p:nvPr/>
+        </p:nvSpPr>
+        <p:spPr>
+          <a:xfrm>
+            <a:off x="6263640" y="3886200"/>
+            <a:ext cx="5760720" cy="2514600"/>
+          </a:xfrm>
+          <a:prstGeom prst="rect">
+            <a:avLst/>
+          </a:prstGeom>
+          <a:solidFill>
+            <a:srgbClr val="ECF0F1"/>
+          </a:solidFill>
+          <a:ln w="25400">
+            <a:solidFill>
+              <a:srgbClr val="0D2B55"/>
+            </a:solidFill>
+          </a:ln>
+        </p:spPr>
+        <p:style>
+          <a:lnRef idx="1">
+            <a:schemeClr val="accent1"/>
+          </a:lnRef>
+          <a:fillRef idx="3">
+            <a:schemeClr val="accent1"/>
+          </a:fillRef>
+          <a:effectRef idx="2">
+            <a:schemeClr val="accent1"/>
+          </a:effectRef>
+          <a:fontRef idx="minor">
+            <a:schemeClr val="lt1"/>
+          </a:fontRef>
+        </p:style>
+        <p:txBody>
+          <a:bodyPr rtlCol="0" anchor="ctr"/>
+          <a:lstStyle/>
+          <a:p>
+            <a:pPr algn="ctr"/>
+          </a:p>
+        </p:txBody>
+      </p:sp>
+      <p:sp>
+        <p:nvSpPr>
+          <p:cNvPr id="24" name="Rectangle 23"/>
+          <p:cNvSpPr/>
+          <p:nvPr/>
+        </p:nvSpPr>
+        <p:spPr>
+          <a:xfrm>
+            <a:off x="6263640" y="3886200"/>
+            <a:ext cx="5760720" cy="347472"/>
+          </a:xfrm>
+          <a:prstGeom prst="rect">
+            <a:avLst/>
+          </a:prstGeom>
+          <a:solidFill>
+            <a:srgbClr val="0D2B55"/>
+          </a:solidFill>
+          <a:ln>
+            <a:noFill/>
+          </a:ln>
+        </p:spPr>
+        <p:style>
+          <a:lnRef idx="1">
+            <a:schemeClr val="accent1"/>
+          </a:lnRef>
+          <a:fillRef idx="3">
+            <a:schemeClr val="accent1"/>
+          </a:fillRef>
+          <a:effectRef idx="2">
+            <a:schemeClr val="accent1"/>
+          </a:effectRef>
+          <a:fontRef idx="minor">
+            <a:schemeClr val="lt1"/>
+          </a:fontRef>
+        </p:style>
+        <p:txBody>
+          <a:bodyPr rtlCol="0" anchor="ctr"/>
+          <a:lstStyle/>
+          <a:p>
+            <a:pPr algn="ctr"/>
+          </a:p>
+        </p:txBody>
+      </p:sp>
+      <p:sp>
+        <p:nvSpPr>
+          <p:cNvPr id="25" name="TextBox 24"/>
+          <p:cNvSpPr txBox="1"/>
+          <p:nvPr/>
+        </p:nvSpPr>
+        <p:spPr>
+          <a:xfrm>
+            <a:off x="6373368" y="3922776"/>
+            <a:ext cx="5577840" cy="274320"/>
+          </a:xfrm>
+          <a:prstGeom prst="rect">
+            <a:avLst/>
+          </a:prstGeom>
+          <a:noFill/>
+        </p:spPr>
+        <p:txBody>
+          <a:bodyPr wrap="square">
+            <a:spAutoFit/>
+          </a:bodyPr>
+          <a:lstStyle/>
+          <a:p>
+            <a:pPr algn="l"/>
+            <a:r>
+              <a:rPr sz="1200" b="1" i="0">
+                <a:solidFill>
+                  <a:srgbClr val="FFFFFF"/>
+                </a:solidFill>
+              </a:rPr>
+              <a:t>效率对比 / 审计日志</a:t>
+            </a:r>
+          </a:p>
+        </p:txBody>
+      </p:sp>
+      <p:sp>
+        <p:nvSpPr>
+          <p:cNvPr id="26" name="TextBox 25"/>
+          <p:cNvSpPr txBox="1"/>
+          <p:nvPr/>
+        </p:nvSpPr>
+        <p:spPr>
+          <a:xfrm>
+            <a:off x="6263640" y="4709160"/>
+            <a:ext cx="5760720" cy="457200"/>
+          </a:xfrm>
+          <a:prstGeom prst="rect">
+            <a:avLst/>
+          </a:prstGeom>
+          <a:noFill/>
+        </p:spPr>
+        <p:txBody>
+          <a:bodyPr wrap="square">
+            <a:spAutoFit/>
+          </a:bodyPr>
+          <a:lstStyle/>
+          <a:p>
+            <a:pPr algn="ctr"/>
+            <a:r>
+              <a:rPr sz="1800" b="0" i="1">
+                <a:solidFill>
+                  <a:srgbClr val="95A5A6"/>
+                </a:solidFill>
+              </a:rPr>
+              <a:t>[ 截图占位 ]</a:t>
+            </a:r>
+          </a:p>
+        </p:txBody>
+      </p:sp>
+      <p:sp>
+        <p:nvSpPr>
+          <p:cNvPr id="27" name="TextBox 26"/>
+          <p:cNvSpPr txBox="1"/>
+          <p:nvPr/>
+        </p:nvSpPr>
+        <p:spPr>
+          <a:xfrm>
+            <a:off x="6400800" y="5303520"/>
+            <a:ext cx="5532120" cy="548640"/>
+          </a:xfrm>
+          <a:prstGeom prst="rect">
+            <a:avLst/>
+          </a:prstGeom>
+          <a:noFill/>
+        </p:spPr>
+        <p:txBody>
+          <a:bodyPr wrap="square">
+            <a:spAutoFit/>
+          </a:bodyPr>
+          <a:lstStyle/>
+          <a:p>
+            <a:pPr algn="ctr"/>
+            <a:r>
+              <a:rPr sz="1050" b="0" i="0">
+                <a:solidFill>
+                  <a:srgbClr val="2C3E50"/>
+                </a:solidFill>
+              </a:rPr>
+              <a:t>操作记录 · 时间 · 操作人 · 影响范围</a:t>
+            </a:r>
+          </a:p>
+        </p:txBody>
+      </p:sp>
+      <p:sp>
+        <p:nvSpPr>
+          <p:cNvPr id="28" name="Rectangle 27"/>
+          <p:cNvSpPr/>
+          <p:nvPr/>
+        </p:nvSpPr>
+        <p:spPr>
+          <a:xfrm>
+            <a:off x="274320" y="6446520"/>
+            <a:ext cx="11612880" cy="274320"/>
+          </a:xfrm>
+          <a:prstGeom prst="rect">
+            <a:avLst/>
+          </a:prstGeom>
+          <a:solidFill>
+            <a:srgbClr val="EBF5FF"/>
+          </a:solidFill>
+          <a:ln w="12700">
+            <a:solidFill>
+              <a:srgbClr val="0070C0"/>
+            </a:solidFill>
+          </a:ln>
+        </p:spPr>
+        <p:style>
+          <a:lnRef idx="1">
+            <a:schemeClr val="accent1"/>
+          </a:lnRef>
+          <a:fillRef idx="3">
+            <a:schemeClr val="accent1"/>
+          </a:fillRef>
+          <a:effectRef idx="2">
+            <a:schemeClr val="accent1"/>
+          </a:effectRef>
+          <a:fontRef idx="minor">
+            <a:schemeClr val="lt1"/>
+          </a:fontRef>
+        </p:style>
+        <p:txBody>
+          <a:bodyPr rtlCol="0" anchor="ctr"/>
+          <a:lstStyle/>
+          <a:p>
+            <a:pPr algn="ctr"/>
+          </a:p>
+        </p:txBody>
+      </p:sp>
+      <p:sp>
+        <p:nvSpPr>
+          <p:cNvPr id="29" name="TextBox 28"/>
+          <p:cNvSpPr txBox="1"/>
+          <p:nvPr/>
+        </p:nvSpPr>
+        <p:spPr>
+          <a:xfrm>
+            <a:off x="411480" y="6464808"/>
+            <a:ext cx="11338560" cy="228600"/>
+          </a:xfrm>
+          <a:prstGeom prst="rect">
+            <a:avLst/>
+          </a:prstGeom>
+          <a:noFill/>
+        </p:spPr>
+        <p:txBody>
+          <a:bodyPr wrap="square">
+            <a:spAutoFit/>
+          </a:bodyPr>
+          <a:lstStyle/>
+          <a:p>
+            <a:pPr algn="ctr"/>
+            <a:r>
+              <a:rPr sz="1000" b="0" i="0">
+                <a:solidFill>
+                  <a:srgbClr val="0070C0"/>
+                </a:solidFill>
+              </a:rPr>
+              <a:t>💡 如需查看完整功能，可进行系统 Demo 演示</a:t>
+            </a:r>
+          </a:p>
+        </p:txBody>
+      </p:sp>
+    </p:spTree>
+  </p:cSld>
+  <p:clrMapOvr>
+    <a:masterClrMapping/>
+  </p:clrMapOvr>
+</p:sld>
+</file>
+
+<file path=ppt/slides/slide25.xml><?xml version="1.0" encoding="utf-8"?>
+<p:sld xmlns:a="http://schemas.openxmlformats.org/drawingml/2006/main" xmlns:p="http://schemas.openxmlformats.org/presentationml/2006/main" xmlns:r="http://schemas.openxmlformats.org/officeDocument/2006/relationships">
+  <p:cSld>
+    <p:spTree>
+      <p:nvGrpSpPr>
+        <p:cNvPr id="1" name=""/>
+        <p:cNvGrpSpPr/>
+        <p:nvPr/>
+      </p:nvGrpSpPr>
+      <p:grpSpPr/>
+      <p:sp>
+        <p:nvSpPr>
+          <p:cNvPr id="2" name="Rectangle 1"/>
+          <p:cNvSpPr/>
+          <p:nvPr/>
+        </p:nvSpPr>
+        <p:spPr>
+          <a:xfrm>
+            <a:off x="0" y="0"/>
+            <a:ext cx="12188952" cy="6858000"/>
+          </a:xfrm>
+          <a:prstGeom prst="rect">
+            <a:avLst/>
+          </a:prstGeom>
+          <a:solidFill>
+            <a:srgbClr val="0D2B55"/>
+          </a:solidFill>
+          <a:ln>
+            <a:noFill/>
+          </a:ln>
+        </p:spPr>
+        <p:style>
+          <a:lnRef idx="1">
+            <a:schemeClr val="accent1"/>
+          </a:lnRef>
+          <a:fillRef idx="3">
+            <a:schemeClr val="accent1"/>
+          </a:fillRef>
+          <a:effectRef idx="2">
+            <a:schemeClr val="accent1"/>
+          </a:effectRef>
+          <a:fontRef idx="minor">
+            <a:schemeClr val="lt1"/>
+          </a:fontRef>
+        </p:style>
+        <p:txBody>
+          <a:bodyPr rtlCol="0" anchor="ctr"/>
+          <a:lstStyle/>
+          <a:p>
+            <a:pPr algn="ctr"/>
+          </a:p>
+        </p:txBody>
+      </p:sp>
+      <p:sp>
+        <p:nvSpPr>
           <p:cNvPr id="3" name="Rectangle 2"/>
           <p:cNvSpPr/>
           <p:nvPr/>
@@ -22029,7 +23109,7 @@
                   <a:srgbClr val="FFFFFF"/>
                 </a:solidFill>
               </a:rPr>
-              <a:t>二十三、总结陈述</a:t>
+              <a:t>二十四、总结陈述</a:t>
             </a:r>
           </a:p>
         </p:txBody>
@@ -23325,7 +24405,7 @@
                   <a:srgbClr val="FFFFFF"/>
                 </a:solidFill>
               </a:rPr>
-              <a:t>🔵 配置不可回滚</a:t>
+              <a:t>🔵 紧急修改缺乏追踪</a:t>
             </a:r>
           </a:p>
         </p:txBody>
@@ -23359,9 +24439,10 @@
                   <a:srgbClr val="2C3E50"/>
                 </a:solidFill>
               </a:rPr>
-              <a:t>配置文件缺乏版本管理，修改后若出现问题，
-无法快速恢复到上一个稳定版本，
-只能靠人工记忆或搜索历史来还原。</a:t>
+              <a:t>故障时运维直接 SSH 到机器上修改配置，
+绕过了发布系统，该次变更无法被追踪和回滚，
+待故障平息后往往忘记同步到 GitLab，
+形成"线上配置与仓库不一致"的隐患。</a:t>
             </a:r>
           </a:p>
         </p:txBody>
@@ -24004,7 +25085,7 @@
         <p:spPr>
           <a:xfrm>
             <a:off x="274320" y="1572768"/>
-            <a:ext cx="2331720" cy="1207008"/>
+            <a:ext cx="2331720" cy="1115568"/>
           </a:xfrm>
           <a:prstGeom prst="rect">
             <a:avLst/>
@@ -24048,8 +25129,8 @@
         </p:nvSpPr>
         <p:spPr>
           <a:xfrm>
-            <a:off x="347472" y="1664208"/>
-            <a:ext cx="2148840" cy="1069848"/>
+            <a:off x="347472" y="1645920"/>
+            <a:ext cx="2148840" cy="1024128"/>
           </a:xfrm>
           <a:prstGeom prst="rect">
             <a:avLst/>
@@ -24083,7 +25164,7 @@
         <p:spPr>
           <a:xfrm>
             <a:off x="2651760" y="1572768"/>
-            <a:ext cx="4206240" cy="1207008"/>
+            <a:ext cx="4206240" cy="1115568"/>
           </a:xfrm>
           <a:prstGeom prst="rect">
             <a:avLst/>
@@ -24127,23 +25208,23 @@
         </p:nvSpPr>
         <p:spPr>
           <a:xfrm>
-            <a:off x="2743200" y="1645920"/>
-            <a:ext cx="4023360" cy="1097280"/>
-          </a:xfrm>
-          <a:prstGeom prst="rect">
-            <a:avLst/>
-          </a:prstGeom>
-          <a:noFill/>
-        </p:spPr>
-        <p:txBody>
-          <a:bodyPr wrap="square">
-            <a:spAutoFit/>
-          </a:bodyPr>
-          <a:lstStyle/>
-          <a:p>
-            <a:pPr algn="l"/>
-            <a:r>
-              <a:rPr sz="1050" b="0" i="0">
+            <a:off x="2743200" y="1636776"/>
+            <a:ext cx="4023360" cy="1024128"/>
+          </a:xfrm>
+          <a:prstGeom prst="rect">
+            <a:avLst/>
+          </a:prstGeom>
+          <a:noFill/>
+        </p:spPr>
+        <p:txBody>
+          <a:bodyPr wrap="square">
+            <a:spAutoFit/>
+          </a:bodyPr>
+          <a:lstStyle/>
+          <a:p>
+            <a:pPr algn="l"/>
+            <a:r>
+              <a:rPr sz="1000" b="0" i="0">
                 <a:solidFill>
                   <a:srgbClr val="27AE60"/>
                 </a:solidFill>
@@ -24165,7 +25246,7 @@
         <p:spPr>
           <a:xfrm>
             <a:off x="6949440" y="1572768"/>
-            <a:ext cx="4937760" cy="1207008"/>
+            <a:ext cx="4937760" cy="1115568"/>
           </a:xfrm>
           <a:prstGeom prst="rect">
             <a:avLst/>
@@ -24209,23 +25290,23 @@
         </p:nvSpPr>
         <p:spPr>
           <a:xfrm>
-            <a:off x="7040880" y="1645920"/>
-            <a:ext cx="4754880" cy="1097280"/>
-          </a:xfrm>
-          <a:prstGeom prst="rect">
-            <a:avLst/>
-          </a:prstGeom>
-          <a:noFill/>
-        </p:spPr>
-        <p:txBody>
-          <a:bodyPr wrap="square">
-            <a:spAutoFit/>
-          </a:bodyPr>
-          <a:lstStyle/>
-          <a:p>
-            <a:pPr algn="l"/>
-            <a:r>
-              <a:rPr sz="1050" b="0" i="0">
+            <a:off x="7040880" y="1636776"/>
+            <a:ext cx="4754880" cy="1024128"/>
+          </a:xfrm>
+          <a:prstGeom prst="rect">
+            <a:avLst/>
+          </a:prstGeom>
+          <a:noFill/>
+        </p:spPr>
+        <p:txBody>
+          <a:bodyPr wrap="square">
+            <a:spAutoFit/>
+          </a:bodyPr>
+          <a:lstStyle/>
+          <a:p>
+            <a:pPr algn="l"/>
+            <a:r>
+              <a:rPr sz="1000" b="0" i="0">
                 <a:solidFill>
                   <a:srgbClr val="2C3E50"/>
                 </a:solidFill>
@@ -24244,8 +25325,8 @@
         </p:nvSpPr>
         <p:spPr>
           <a:xfrm>
-            <a:off x="274320" y="1103689687968"/>
-            <a:ext cx="2331720" cy="1207008"/>
+            <a:off x="274320" y="2688336"/>
+            <a:ext cx="2331720" cy="1115568"/>
           </a:xfrm>
           <a:prstGeom prst="rect">
             <a:avLst/>
@@ -24289,8 +25370,8 @@
         </p:nvSpPr>
         <p:spPr>
           <a:xfrm>
-            <a:off x="347472" y="1103689779408"/>
-            <a:ext cx="2148840" cy="1069848"/>
+            <a:off x="347472" y="2761488"/>
+            <a:ext cx="2148840" cy="1024128"/>
           </a:xfrm>
           <a:prstGeom prst="rect">
             <a:avLst/>
@@ -24323,8 +25404,8 @@
         </p:nvSpPr>
         <p:spPr>
           <a:xfrm>
-            <a:off x="2651760" y="1103689687968"/>
-            <a:ext cx="4206240" cy="1207008"/>
+            <a:off x="2651760" y="2688336"/>
+            <a:ext cx="4206240" cy="1115568"/>
           </a:xfrm>
           <a:prstGeom prst="rect">
             <a:avLst/>
@@ -24368,23 +25449,23 @@
         </p:nvSpPr>
         <p:spPr>
           <a:xfrm>
-            <a:off x="2743200" y="1103689761120"/>
-            <a:ext cx="4023360" cy="1097280"/>
-          </a:xfrm>
-          <a:prstGeom prst="rect">
-            <a:avLst/>
-          </a:prstGeom>
-          <a:noFill/>
-        </p:spPr>
-        <p:txBody>
-          <a:bodyPr wrap="square">
-            <a:spAutoFit/>
-          </a:bodyPr>
-          <a:lstStyle/>
-          <a:p>
-            <a:pPr algn="l"/>
-            <a:r>
-              <a:rPr sz="1050" b="0" i="0">
+            <a:off x="2743200" y="2752344"/>
+            <a:ext cx="4023360" cy="1024128"/>
+          </a:xfrm>
+          <a:prstGeom prst="rect">
+            <a:avLst/>
+          </a:prstGeom>
+          <a:noFill/>
+        </p:spPr>
+        <p:txBody>
+          <a:bodyPr wrap="square">
+            <a:spAutoFit/>
+          </a:bodyPr>
+          <a:lstStyle/>
+          <a:p>
+            <a:pPr algn="l"/>
+            <a:r>
+              <a:rPr sz="1000" b="0" i="0">
                 <a:solidFill>
                   <a:srgbClr val="0070C0"/>
                 </a:solidFill>
@@ -24404,8 +25485,8 @@
         </p:nvSpPr>
         <p:spPr>
           <a:xfrm>
-            <a:off x="6949440" y="1103689687968"/>
-            <a:ext cx="4937760" cy="1207008"/>
+            <a:off x="6949440" y="2688336"/>
+            <a:ext cx="4937760" cy="1115568"/>
           </a:xfrm>
           <a:prstGeom prst="rect">
             <a:avLst/>
@@ -24449,23 +25530,23 @@
         </p:nvSpPr>
         <p:spPr>
           <a:xfrm>
-            <a:off x="7040880" y="1103689761120"/>
-            <a:ext cx="4754880" cy="1097280"/>
-          </a:xfrm>
-          <a:prstGeom prst="rect">
-            <a:avLst/>
-          </a:prstGeom>
-          <a:noFill/>
-        </p:spPr>
-        <p:txBody>
-          <a:bodyPr wrap="square">
-            <a:spAutoFit/>
-          </a:bodyPr>
-          <a:lstStyle/>
-          <a:p>
-            <a:pPr algn="l"/>
-            <a:r>
-              <a:rPr sz="1050" b="0" i="0">
+            <a:off x="7040880" y="2752344"/>
+            <a:ext cx="4754880" cy="1024128"/>
+          </a:xfrm>
+          <a:prstGeom prst="rect">
+            <a:avLst/>
+          </a:prstGeom>
+          <a:noFill/>
+        </p:spPr>
+        <p:txBody>
+          <a:bodyPr wrap="square">
+            <a:spAutoFit/>
+          </a:bodyPr>
+          <a:lstStyle/>
+          <a:p>
+            <a:pPr algn="l"/>
+            <a:r>
+              <a:rPr sz="1000" b="0" i="0">
                 <a:solidFill>
                   <a:srgbClr val="0070C0"/>
                 </a:solidFill>
@@ -24486,8 +25567,8 @@
         </p:nvSpPr>
         <p:spPr>
           <a:xfrm>
-            <a:off x="274320" y="2207377803168"/>
-            <a:ext cx="2331720" cy="1207008"/>
+            <a:off x="274320" y="3803904"/>
+            <a:ext cx="2331720" cy="1115568"/>
           </a:xfrm>
           <a:prstGeom prst="rect">
             <a:avLst/>
@@ -24531,8 +25612,8 @@
         </p:nvSpPr>
         <p:spPr>
           <a:xfrm>
-            <a:off x="347472" y="2207377894608"/>
-            <a:ext cx="2148840" cy="1069848"/>
+            <a:off x="347472" y="3877056"/>
+            <a:ext cx="2148840" cy="1024128"/>
           </a:xfrm>
           <a:prstGeom prst="rect">
             <a:avLst/>
@@ -24565,8 +25646,8 @@
         </p:nvSpPr>
         <p:spPr>
           <a:xfrm>
-            <a:off x="2651760" y="2207377803168"/>
-            <a:ext cx="4206240" cy="1207008"/>
+            <a:off x="2651760" y="3803904"/>
+            <a:ext cx="4206240" cy="1115568"/>
           </a:xfrm>
           <a:prstGeom prst="rect">
             <a:avLst/>
@@ -24610,23 +25691,23 @@
         </p:nvSpPr>
         <p:spPr>
           <a:xfrm>
-            <a:off x="2743200" y="2207377876320"/>
-            <a:ext cx="4023360" cy="1097280"/>
-          </a:xfrm>
-          <a:prstGeom prst="rect">
-            <a:avLst/>
-          </a:prstGeom>
-          <a:noFill/>
-        </p:spPr>
-        <p:txBody>
-          <a:bodyPr wrap="square">
-            <a:spAutoFit/>
-          </a:bodyPr>
-          <a:lstStyle/>
-          <a:p>
-            <a:pPr algn="l"/>
-            <a:r>
-              <a:rPr sz="1050" b="0" i="0">
+            <a:off x="2743200" y="3867912"/>
+            <a:ext cx="4023360" cy="1024128"/>
+          </a:xfrm>
+          <a:prstGeom prst="rect">
+            <a:avLst/>
+          </a:prstGeom>
+          <a:noFill/>
+        </p:spPr>
+        <p:txBody>
+          <a:bodyPr wrap="square">
+            <a:spAutoFit/>
+          </a:bodyPr>
+          <a:lstStyle/>
+          <a:p>
+            <a:pPr algn="l"/>
+            <a:r>
+              <a:rPr sz="1000" b="0" i="0">
                 <a:solidFill>
                   <a:srgbClr val="E67E22"/>
                 </a:solidFill>
@@ -24647,8 +25728,8 @@
         </p:nvSpPr>
         <p:spPr>
           <a:xfrm>
-            <a:off x="6949440" y="2207377803168"/>
-            <a:ext cx="4937760" cy="1207008"/>
+            <a:off x="6949440" y="3803904"/>
+            <a:ext cx="4937760" cy="1115568"/>
           </a:xfrm>
           <a:prstGeom prst="rect">
             <a:avLst/>
@@ -24692,23 +25773,23 @@
         </p:nvSpPr>
         <p:spPr>
           <a:xfrm>
-            <a:off x="7040880" y="2207377876320"/>
-            <a:ext cx="4754880" cy="1097280"/>
-          </a:xfrm>
-          <a:prstGeom prst="rect">
-            <a:avLst/>
-          </a:prstGeom>
-          <a:noFill/>
-        </p:spPr>
-        <p:txBody>
-          <a:bodyPr wrap="square">
-            <a:spAutoFit/>
-          </a:bodyPr>
-          <a:lstStyle/>
-          <a:p>
-            <a:pPr algn="l"/>
-            <a:r>
-              <a:rPr sz="1050" b="0" i="0">
+            <a:off x="7040880" y="3867912"/>
+            <a:ext cx="4754880" cy="1024128"/>
+          </a:xfrm>
+          <a:prstGeom prst="rect">
+            <a:avLst/>
+          </a:prstGeom>
+          <a:noFill/>
+        </p:spPr>
+        <p:txBody>
+          <a:bodyPr wrap="square">
+            <a:spAutoFit/>
+          </a:bodyPr>
+          <a:lstStyle/>
+          <a:p>
+            <a:pPr algn="l"/>
+            <a:r>
+              <a:rPr sz="1000" b="0" i="0">
                 <a:solidFill>
                   <a:srgbClr val="E67E22"/>
                 </a:solidFill>
@@ -24729,8 +25810,8 @@
         </p:nvSpPr>
         <p:spPr>
           <a:xfrm>
-            <a:off x="274320" y="3311065918368"/>
-            <a:ext cx="2331720" cy="1207008"/>
+            <a:off x="274320" y="4919472"/>
+            <a:ext cx="2331720" cy="1115568"/>
           </a:xfrm>
           <a:prstGeom prst="rect">
             <a:avLst/>
@@ -24774,8 +25855,8 @@
         </p:nvSpPr>
         <p:spPr>
           <a:xfrm>
-            <a:off x="347472" y="3311066009808"/>
-            <a:ext cx="2148840" cy="1069848"/>
+            <a:off x="347472" y="4992624"/>
+            <a:ext cx="2148840" cy="1024128"/>
           </a:xfrm>
           <a:prstGeom prst="rect">
             <a:avLst/>
@@ -24808,8 +25889,8 @@
         </p:nvSpPr>
         <p:spPr>
           <a:xfrm>
-            <a:off x="2651760" y="3311065918368"/>
-            <a:ext cx="4206240" cy="1207008"/>
+            <a:off x="2651760" y="4919472"/>
+            <a:ext cx="4206240" cy="1115568"/>
           </a:xfrm>
           <a:prstGeom prst="rect">
             <a:avLst/>
@@ -24853,23 +25934,23 @@
         </p:nvSpPr>
         <p:spPr>
           <a:xfrm>
-            <a:off x="2743200" y="3311065991520"/>
-            <a:ext cx="4023360" cy="1097280"/>
-          </a:xfrm>
-          <a:prstGeom prst="rect">
-            <a:avLst/>
-          </a:prstGeom>
-          <a:noFill/>
-        </p:spPr>
-        <p:txBody>
-          <a:bodyPr wrap="square">
-            <a:spAutoFit/>
-          </a:bodyPr>
-          <a:lstStyle/>
-          <a:p>
-            <a:pPr algn="l"/>
-            <a:r>
-              <a:rPr sz="1050" b="0" i="0">
+            <a:off x="2743200" y="4983480"/>
+            <a:ext cx="4023360" cy="1024128"/>
+          </a:xfrm>
+          <a:prstGeom prst="rect">
+            <a:avLst/>
+          </a:prstGeom>
+          <a:noFill/>
+        </p:spPr>
+        <p:txBody>
+          <a:bodyPr wrap="square">
+            <a:spAutoFit/>
+          </a:bodyPr>
+          <a:lstStyle/>
+          <a:p>
+            <a:pPr algn="l"/>
+            <a:r>
+              <a:rPr sz="1000" b="0" i="0">
                 <a:solidFill>
                   <a:srgbClr val="E74C3C"/>
                 </a:solidFill>
@@ -24889,8 +25970,8 @@
         </p:nvSpPr>
         <p:spPr>
           <a:xfrm>
-            <a:off x="6949440" y="3311065918368"/>
-            <a:ext cx="4937760" cy="1207008"/>
+            <a:off x="6949440" y="4919472"/>
+            <a:ext cx="4937760" cy="1115568"/>
           </a:xfrm>
           <a:prstGeom prst="rect">
             <a:avLst/>
@@ -24934,23 +26015,23 @@
         </p:nvSpPr>
         <p:spPr>
           <a:xfrm>
-            <a:off x="7040880" y="3311065991520"/>
-            <a:ext cx="4754880" cy="1097280"/>
-          </a:xfrm>
-          <a:prstGeom prst="rect">
-            <a:avLst/>
-          </a:prstGeom>
-          <a:noFill/>
-        </p:spPr>
-        <p:txBody>
-          <a:bodyPr wrap="square">
-            <a:spAutoFit/>
-          </a:bodyPr>
-          <a:lstStyle/>
-          <a:p>
-            <a:pPr algn="l"/>
-            <a:r>
-              <a:rPr sz="1050" b="0" i="0">
+            <a:off x="7040880" y="4983480"/>
+            <a:ext cx="4754880" cy="1024128"/>
+          </a:xfrm>
+          <a:prstGeom prst="rect">
+            <a:avLst/>
+          </a:prstGeom>
+          <a:noFill/>
+        </p:spPr>
+        <p:txBody>
+          <a:bodyPr wrap="square">
+            <a:spAutoFit/>
+          </a:bodyPr>
+          <a:lstStyle/>
+          <a:p>
+            <a:pPr algn="l"/>
+            <a:r>
+              <a:rPr sz="1000" b="0" i="0">
                 <a:solidFill>
                   <a:srgbClr val="E74C3C"/>
                 </a:solidFill>
@@ -24970,7 +26051,7 @@
         </p:nvSpPr>
         <p:spPr>
           <a:xfrm>
-            <a:off x="274320" y="6400800"/>
+            <a:off x="274320" y="6089904"/>
             <a:ext cx="11612880" cy="292608"/>
           </a:xfrm>
           <a:prstGeom prst="rect">
@@ -25015,7 +26096,7 @@
         </p:nvSpPr>
         <p:spPr>
           <a:xfrm>
-            <a:off x="411480" y="6419088"/>
+            <a:off x="411480" y="6108192"/>
             <a:ext cx="11338560" cy="256032"/>
           </a:xfrm>
           <a:prstGeom prst="rect">
@@ -30324,7 +31405,7 @@
                 </a:solidFill>
               </a:rPr>
               <a:t>• 支持单台录入（FQDN / IP / 服务名 / 目录）
-• 支持 Excel 批量导入，一次录入数十台
+• 支持批量新增（在线表格逐行填写，一次提交）
 • 新增时可同步在 GitLab 创建配置占位
 • 新增完成后可立即触发初始化</a:t>
             </a:r>
@@ -30483,9 +31564,9 @@
                 </a:solidFill>
               </a:rPr>
               <a:t>• 自定义标签（如：出口机 / 内网机 / 测试机）
-• 按标签批量执行操作（批量初始化、批量部署）
+• 按标签筛选后勾选，可批量初始化
 • 标签过滤快速定位目标机器
-• 多标签叠加组合查询</a:t>
+• 支持单标签筛选（多标签组合查询待规划）</a:t>
             </a:r>
           </a:p>
         </p:txBody>
